--- a/Carruseles/Carrusel-Como-funciona.pptx
+++ b/Carruseles/Carrusel-Como-funciona.pptx
@@ -3092,9 +3092,53 @@
         <p:nvPr/>
       </p:nvGrpSpPr>
       <p:grpSpPr/>
+      <p:sp>
+        <p:nvSpPr>
+          <p:cNvPr id="2" name="Rectangle 1"/>
+          <p:cNvSpPr/>
+          <p:nvPr/>
+        </p:nvSpPr>
+        <p:spPr>
+          <a:xfrm>
+            <a:off x="0" y="0"/>
+            <a:ext cx="10287000" cy="12858750"/>
+          </a:xfrm>
+          <a:prstGeom prst="rect">
+            <a:avLst/>
+          </a:prstGeom>
+          <a:solidFill>
+            <a:srgbClr val="FFFFFF"/>
+          </a:solidFill>
+          <a:ln>
+            <a:noFill/>
+          </a:ln>
+          <a:effectLst/>
+        </p:spPr>
+        <p:style>
+          <a:lnRef idx="1">
+            <a:schemeClr val="accent1"/>
+          </a:lnRef>
+          <a:fillRef idx="3">
+            <a:schemeClr val="accent1"/>
+          </a:fillRef>
+          <a:effectRef idx="2">
+            <a:schemeClr val="accent1"/>
+          </a:effectRef>
+          <a:fontRef idx="minor">
+            <a:schemeClr val="lt1"/>
+          </a:fontRef>
+        </p:style>
+        <p:txBody>
+          <a:bodyPr rtlCol="0" anchor="ctr"/>
+          <a:lstStyle/>
+          <a:p>
+            <a:pPr algn="ctr"/>
+          </a:p>
+        </p:txBody>
+      </p:sp>
       <p:pic>
         <p:nvPicPr>
-          <p:cNvPr id="2" name="Picture 1" descr="01 Portada.png"/>
+          <p:cNvPr id="3" name="Picture 2" descr="Isotipo_app.png"/>
           <p:cNvPicPr>
             <a:picLocks noChangeAspect="1"/>
           </p:cNvPicPr>
@@ -3108,8 +3152,79 @@
         </p:blipFill>
         <p:spPr>
           <a:xfrm>
-            <a:off x="0" y="0"/>
-            <a:ext cx="10287000" cy="12858750"/>
+            <a:off x="1143000" y="2238375"/>
+            <a:ext cx="1428750" cy="1428750"/>
+          </a:xfrm>
+          <a:prstGeom prst="rect">
+            <a:avLst/>
+          </a:prstGeom>
+        </p:spPr>
+      </p:pic>
+      <p:sp>
+        <p:nvSpPr>
+          <p:cNvPr id="4" name="TextBox 3"/>
+          <p:cNvSpPr txBox="1"/>
+          <p:nvPr/>
+        </p:nvSpPr>
+        <p:spPr>
+          <a:xfrm>
+            <a:off x="2857500" y="2238375"/>
+            <a:ext cx="6096000" cy="1905000"/>
+          </a:xfrm>
+          <a:prstGeom prst="rect">
+            <a:avLst/>
+          </a:prstGeom>
+          <a:noFill/>
+        </p:spPr>
+        <p:txBody>
+          <a:bodyPr wrap="square" anchor="ctr">
+            <a:spAutoFit/>
+          </a:bodyPr>
+          <a:lstStyle/>
+          <a:p>
+            <a:pPr algn="l"/>
+            <a:r>
+              <a:rPr sz="4400" b="1">
+                <a:solidFill>
+                  <a:srgbClr val="7855F8"/>
+                </a:solidFill>
+                <a:latin typeface="Manrope"/>
+              </a:rPr>
+              <a:t>¿Cómo funciona</a:t>
+            </a:r>
+          </a:p>
+          <a:p>
+            <a:pPr algn="l"/>
+            <a:r>
+              <a:rPr sz="4400" b="1">
+                <a:solidFill>
+                  <a:srgbClr val="7855F8"/>
+                </a:solidFill>
+                <a:latin typeface="Manrope"/>
+              </a:rPr>
+              <a:t>Fixeep?</a:t>
+            </a:r>
+          </a:p>
+        </p:txBody>
+      </p:sp>
+      <p:pic>
+        <p:nvPicPr>
+          <p:cNvPr id="5" name="Picture 4" descr="mascota-perro.png"/>
+          <p:cNvPicPr>
+            <a:picLocks noChangeAspect="1"/>
+          </p:cNvPicPr>
+          <p:nvPr/>
+        </p:nvPicPr>
+        <p:blipFill>
+          <a:blip r:embed="rId3"/>
+          <a:stretch>
+            <a:fillRect/>
+          </a:stretch>
+        </p:blipFill>
+        <p:spPr>
+          <a:xfrm>
+            <a:off x="2095500" y="7524750"/>
+            <a:ext cx="6096000" cy="6096000"/>
           </a:xfrm>
           <a:prstGeom prst="rect">
             <a:avLst/>
@@ -3134,9 +3249,97 @@
         <p:nvPr/>
       </p:nvGrpSpPr>
       <p:grpSpPr/>
+      <p:sp>
+        <p:nvSpPr>
+          <p:cNvPr id="2" name="Rectangle 1"/>
+          <p:cNvSpPr/>
+          <p:nvPr/>
+        </p:nvSpPr>
+        <p:spPr>
+          <a:xfrm>
+            <a:off x="0" y="0"/>
+            <a:ext cx="10287000" cy="12858750"/>
+          </a:xfrm>
+          <a:prstGeom prst="rect">
+            <a:avLst/>
+          </a:prstGeom>
+          <a:solidFill>
+            <a:srgbClr val="7855F8"/>
+          </a:solidFill>
+          <a:ln>
+            <a:noFill/>
+          </a:ln>
+          <a:effectLst/>
+        </p:spPr>
+        <p:style>
+          <a:lnRef idx="1">
+            <a:schemeClr val="accent1"/>
+          </a:lnRef>
+          <a:fillRef idx="3">
+            <a:schemeClr val="accent1"/>
+          </a:fillRef>
+          <a:effectRef idx="2">
+            <a:schemeClr val="accent1"/>
+          </a:effectRef>
+          <a:fontRef idx="minor">
+            <a:schemeClr val="lt1"/>
+          </a:fontRef>
+        </p:style>
+        <p:txBody>
+          <a:bodyPr rtlCol="0" anchor="ctr"/>
+          <a:lstStyle/>
+          <a:p>
+            <a:pPr algn="ctr"/>
+          </a:p>
+        </p:txBody>
+      </p:sp>
+      <p:sp>
+        <p:nvSpPr>
+          <p:cNvPr id="3" name="Rounded Rectangle 2"/>
+          <p:cNvSpPr/>
+          <p:nvPr/>
+        </p:nvSpPr>
+        <p:spPr>
+          <a:xfrm>
+            <a:off x="3571875" y="2000250"/>
+            <a:ext cx="3143250" cy="3143250"/>
+          </a:xfrm>
+          <a:prstGeom prst="roundRect">
+            <a:avLst/>
+          </a:prstGeom>
+          <a:solidFill>
+            <a:srgbClr val="FFFFFF"/>
+          </a:solidFill>
+          <a:ln>
+            <a:noFill/>
+          </a:ln>
+          <a:effectLst/>
+        </p:spPr>
+        <p:style>
+          <a:lnRef idx="1">
+            <a:schemeClr val="accent1"/>
+          </a:lnRef>
+          <a:fillRef idx="3">
+            <a:schemeClr val="accent1"/>
+          </a:fillRef>
+          <a:effectRef idx="2">
+            <a:schemeClr val="accent1"/>
+          </a:effectRef>
+          <a:fontRef idx="minor">
+            <a:schemeClr val="lt1"/>
+          </a:fontRef>
+        </p:style>
+        <p:txBody>
+          <a:bodyPr rtlCol="0" anchor="ctr"/>
+          <a:lstStyle/>
+          <a:p>
+            <a:pPr algn="ctr"/>
+          </a:p>
+        </p:txBody>
+      </p:sp>
       <p:pic>
         <p:nvPicPr>
-          <p:cNvPr id="2" name="Picture 1" descr="02 Paso 1.png"/>
+          <p:cNvPr id="4" name="Picture 3" descr="paso-describe.png"/>
           <p:cNvPicPr>
             <a:picLocks noChangeAspect="1"/>
           </p:cNvPicPr>
@@ -3150,8 +3353,218 @@
         </p:blipFill>
         <p:spPr>
           <a:xfrm>
-            <a:off x="0" y="0"/>
-            <a:ext cx="10287000" cy="12858750"/>
+            <a:off x="3952875" y="2381250"/>
+            <a:ext cx="2381250" cy="2381250"/>
+          </a:xfrm>
+          <a:prstGeom prst="rect">
+            <a:avLst/>
+          </a:prstGeom>
+        </p:spPr>
+      </p:pic>
+      <p:sp>
+        <p:nvSpPr>
+          <p:cNvPr id="5" name="Oval 4"/>
+          <p:cNvSpPr/>
+          <p:nvPr/>
+        </p:nvSpPr>
+        <p:spPr>
+          <a:xfrm>
+            <a:off x="6029325" y="1447800"/>
+            <a:ext cx="1238250" cy="1238250"/>
+          </a:xfrm>
+          <a:prstGeom prst="ellipse">
+            <a:avLst/>
+          </a:prstGeom>
+          <a:solidFill>
+            <a:srgbClr val="E88A1A"/>
+          </a:solidFill>
+          <a:ln w="63500">
+            <a:solidFill>
+              <a:srgbClr val="FFFFFF"/>
+            </a:solidFill>
+          </a:ln>
+          <a:effectLst/>
+        </p:spPr>
+        <p:style>
+          <a:lnRef idx="1">
+            <a:schemeClr val="accent1"/>
+          </a:lnRef>
+          <a:fillRef idx="3">
+            <a:schemeClr val="accent1"/>
+          </a:fillRef>
+          <a:effectRef idx="2">
+            <a:schemeClr val="accent1"/>
+          </a:effectRef>
+          <a:fontRef idx="minor">
+            <a:schemeClr val="lt1"/>
+          </a:fontRef>
+        </p:style>
+        <p:txBody>
+          <a:bodyPr rtlCol="0" anchor="ctr"/>
+          <a:lstStyle/>
+          <a:p>
+            <a:pPr algn="ctr"/>
+          </a:p>
+        </p:txBody>
+      </p:sp>
+      <p:sp>
+        <p:nvSpPr>
+          <p:cNvPr id="6" name="TextBox 5"/>
+          <p:cNvSpPr txBox="1"/>
+          <p:nvPr/>
+        </p:nvSpPr>
+        <p:spPr>
+          <a:xfrm>
+            <a:off x="6029325" y="1447800"/>
+            <a:ext cx="1238250" cy="1238250"/>
+          </a:xfrm>
+          <a:prstGeom prst="rect">
+            <a:avLst/>
+          </a:prstGeom>
+          <a:noFill/>
+        </p:spPr>
+        <p:txBody>
+          <a:bodyPr wrap="square" anchor="ctr">
+            <a:spAutoFit/>
+          </a:bodyPr>
+          <a:lstStyle/>
+          <a:p>
+            <a:pPr algn="ctr"/>
+            <a:r>
+              <a:rPr sz="5400" b="1">
+                <a:solidFill>
+                  <a:srgbClr val="FFFFFF"/>
+                </a:solidFill>
+                <a:latin typeface="Manrope"/>
+              </a:rPr>
+              <a:t>1</a:t>
+            </a:r>
+          </a:p>
+        </p:txBody>
+      </p:sp>
+      <p:sp>
+        <p:nvSpPr>
+          <p:cNvPr id="7" name="TextBox 6"/>
+          <p:cNvSpPr txBox="1"/>
+          <p:nvPr/>
+        </p:nvSpPr>
+        <p:spPr>
+          <a:xfrm>
+            <a:off x="762000" y="5619750"/>
+            <a:ext cx="8763000" cy="533400"/>
+          </a:xfrm>
+          <a:prstGeom prst="rect">
+            <a:avLst/>
+          </a:prstGeom>
+          <a:noFill/>
+        </p:spPr>
+        <p:txBody>
+          <a:bodyPr wrap="square" anchor="ctr">
+            <a:spAutoFit/>
+          </a:bodyPr>
+          <a:lstStyle/>
+          <a:p>
+            <a:pPr algn="ctr"/>
+            <a:r>
+              <a:rPr sz="3000" b="1">
+                <a:solidFill>
+                  <a:srgbClr val="E88A1A"/>
+                </a:solidFill>
+                <a:latin typeface="Manrope"/>
+              </a:rPr>
+              <a:t>PASO 1</a:t>
+            </a:r>
+          </a:p>
+        </p:txBody>
+      </p:sp>
+      <p:sp>
+        <p:nvSpPr>
+          <p:cNvPr id="8" name="TextBox 7"/>
+          <p:cNvSpPr txBox="1"/>
+          <p:nvPr/>
+        </p:nvSpPr>
+        <p:spPr>
+          <a:xfrm>
+            <a:off x="666750" y="6248400"/>
+            <a:ext cx="8953500" cy="1714500"/>
+          </a:xfrm>
+          <a:prstGeom prst="rect">
+            <a:avLst/>
+          </a:prstGeom>
+          <a:noFill/>
+        </p:spPr>
+        <p:txBody>
+          <a:bodyPr wrap="square" anchor="ctr">
+            <a:spAutoFit/>
+          </a:bodyPr>
+          <a:lstStyle/>
+          <a:p>
+            <a:pPr algn="ctr"/>
+            <a:r>
+              <a:rPr sz="4600" b="1">
+                <a:solidFill>
+                  <a:srgbClr val="FFFFFF"/>
+                </a:solidFill>
+                <a:latin typeface="Manrope"/>
+              </a:rPr>
+              <a:t>Describe tu trabajo</a:t>
+            </a:r>
+          </a:p>
+        </p:txBody>
+      </p:sp>
+      <p:sp>
+        <p:nvSpPr>
+          <p:cNvPr id="9" name="TextBox 8"/>
+          <p:cNvSpPr txBox="1"/>
+          <p:nvPr/>
+        </p:nvSpPr>
+        <p:spPr>
+          <a:xfrm>
+            <a:off x="1143000" y="7581900"/>
+            <a:ext cx="8001000" cy="1714500"/>
+          </a:xfrm>
+          <a:prstGeom prst="rect">
+            <a:avLst/>
+          </a:prstGeom>
+          <a:noFill/>
+        </p:spPr>
+        <p:txBody>
+          <a:bodyPr wrap="square" anchor="ctr">
+            <a:spAutoFit/>
+          </a:bodyPr>
+          <a:lstStyle/>
+          <a:p>
+            <a:pPr algn="ctr"/>
+            <a:r>
+              <a:rPr sz="2700" b="0">
+                <a:solidFill>
+                  <a:srgbClr val="E1DBFF"/>
+                </a:solidFill>
+                <a:latin typeface="Manrope"/>
+              </a:rPr>
+              <a:t>Elige la categoría, cuéntanos los detalles y sube fotos. Toma un minuto.</a:t>
+            </a:r>
+          </a:p>
+        </p:txBody>
+      </p:sp>
+      <p:pic>
+        <p:nvPicPr>
+          <p:cNvPr id="10" name="Picture 9" descr="logo-blanco.png"/>
+          <p:cNvPicPr>
+            <a:picLocks noChangeAspect="1"/>
+          </p:cNvPicPr>
+          <p:nvPr/>
+        </p:nvPicPr>
+        <p:blipFill>
+          <a:blip r:embed="rId3"/>
+          <a:stretch>
+            <a:fillRect/>
+          </a:stretch>
+        </p:blipFill>
+        <p:spPr>
+          <a:xfrm>
+            <a:off x="4333875" y="11430000"/>
+            <a:ext cx="1619250" cy="822243"/>
           </a:xfrm>
           <a:prstGeom prst="rect">
             <a:avLst/>
@@ -3176,9 +3589,97 @@
         <p:nvPr/>
       </p:nvGrpSpPr>
       <p:grpSpPr/>
+      <p:sp>
+        <p:nvSpPr>
+          <p:cNvPr id="2" name="Rectangle 1"/>
+          <p:cNvSpPr/>
+          <p:nvPr/>
+        </p:nvSpPr>
+        <p:spPr>
+          <a:xfrm>
+            <a:off x="0" y="0"/>
+            <a:ext cx="10287000" cy="12858750"/>
+          </a:xfrm>
+          <a:prstGeom prst="rect">
+            <a:avLst/>
+          </a:prstGeom>
+          <a:solidFill>
+            <a:srgbClr val="00E5E8"/>
+          </a:solidFill>
+          <a:ln>
+            <a:noFill/>
+          </a:ln>
+          <a:effectLst/>
+        </p:spPr>
+        <p:style>
+          <a:lnRef idx="1">
+            <a:schemeClr val="accent1"/>
+          </a:lnRef>
+          <a:fillRef idx="3">
+            <a:schemeClr val="accent1"/>
+          </a:fillRef>
+          <a:effectRef idx="2">
+            <a:schemeClr val="accent1"/>
+          </a:effectRef>
+          <a:fontRef idx="minor">
+            <a:schemeClr val="lt1"/>
+          </a:fontRef>
+        </p:style>
+        <p:txBody>
+          <a:bodyPr rtlCol="0" anchor="ctr"/>
+          <a:lstStyle/>
+          <a:p>
+            <a:pPr algn="ctr"/>
+          </a:p>
+        </p:txBody>
+      </p:sp>
+      <p:sp>
+        <p:nvSpPr>
+          <p:cNvPr id="3" name="Rounded Rectangle 2"/>
+          <p:cNvSpPr/>
+          <p:nvPr/>
+        </p:nvSpPr>
+        <p:spPr>
+          <a:xfrm>
+            <a:off x="3571875" y="2000250"/>
+            <a:ext cx="3143250" cy="3143250"/>
+          </a:xfrm>
+          <a:prstGeom prst="roundRect">
+            <a:avLst/>
+          </a:prstGeom>
+          <a:solidFill>
+            <a:srgbClr val="FFFFFF"/>
+          </a:solidFill>
+          <a:ln>
+            <a:noFill/>
+          </a:ln>
+          <a:effectLst/>
+        </p:spPr>
+        <p:style>
+          <a:lnRef idx="1">
+            <a:schemeClr val="accent1"/>
+          </a:lnRef>
+          <a:fillRef idx="3">
+            <a:schemeClr val="accent1"/>
+          </a:fillRef>
+          <a:effectRef idx="2">
+            <a:schemeClr val="accent1"/>
+          </a:effectRef>
+          <a:fontRef idx="minor">
+            <a:schemeClr val="lt1"/>
+          </a:fontRef>
+        </p:style>
+        <p:txBody>
+          <a:bodyPr rtlCol="0" anchor="ctr"/>
+          <a:lstStyle/>
+          <a:p>
+            <a:pPr algn="ctr"/>
+          </a:p>
+        </p:txBody>
+      </p:sp>
       <p:pic>
         <p:nvPicPr>
-          <p:cNvPr id="2" name="Picture 1" descr="03 Paso 2.png"/>
+          <p:cNvPr id="4" name="Picture 3" descr="paso-contacto.png"/>
           <p:cNvPicPr>
             <a:picLocks noChangeAspect="1"/>
           </p:cNvPicPr>
@@ -3192,8 +3693,218 @@
         </p:blipFill>
         <p:spPr>
           <a:xfrm>
-            <a:off x="0" y="0"/>
-            <a:ext cx="10287000" cy="12858750"/>
+            <a:off x="3952875" y="2381250"/>
+            <a:ext cx="2381250" cy="2381250"/>
+          </a:xfrm>
+          <a:prstGeom prst="rect">
+            <a:avLst/>
+          </a:prstGeom>
+        </p:spPr>
+      </p:pic>
+      <p:sp>
+        <p:nvSpPr>
+          <p:cNvPr id="5" name="Oval 4"/>
+          <p:cNvSpPr/>
+          <p:nvPr/>
+        </p:nvSpPr>
+        <p:spPr>
+          <a:xfrm>
+            <a:off x="6029325" y="1447800"/>
+            <a:ext cx="1238250" cy="1238250"/>
+          </a:xfrm>
+          <a:prstGeom prst="ellipse">
+            <a:avLst/>
+          </a:prstGeom>
+          <a:solidFill>
+            <a:srgbClr val="7855F8"/>
+          </a:solidFill>
+          <a:ln w="63500">
+            <a:solidFill>
+              <a:srgbClr val="FFFFFF"/>
+            </a:solidFill>
+          </a:ln>
+          <a:effectLst/>
+        </p:spPr>
+        <p:style>
+          <a:lnRef idx="1">
+            <a:schemeClr val="accent1"/>
+          </a:lnRef>
+          <a:fillRef idx="3">
+            <a:schemeClr val="accent1"/>
+          </a:fillRef>
+          <a:effectRef idx="2">
+            <a:schemeClr val="accent1"/>
+          </a:effectRef>
+          <a:fontRef idx="minor">
+            <a:schemeClr val="lt1"/>
+          </a:fontRef>
+        </p:style>
+        <p:txBody>
+          <a:bodyPr rtlCol="0" anchor="ctr"/>
+          <a:lstStyle/>
+          <a:p>
+            <a:pPr algn="ctr"/>
+          </a:p>
+        </p:txBody>
+      </p:sp>
+      <p:sp>
+        <p:nvSpPr>
+          <p:cNvPr id="6" name="TextBox 5"/>
+          <p:cNvSpPr txBox="1"/>
+          <p:nvPr/>
+        </p:nvSpPr>
+        <p:spPr>
+          <a:xfrm>
+            <a:off x="6029325" y="1447800"/>
+            <a:ext cx="1238250" cy="1238250"/>
+          </a:xfrm>
+          <a:prstGeom prst="rect">
+            <a:avLst/>
+          </a:prstGeom>
+          <a:noFill/>
+        </p:spPr>
+        <p:txBody>
+          <a:bodyPr wrap="square" anchor="ctr">
+            <a:spAutoFit/>
+          </a:bodyPr>
+          <a:lstStyle/>
+          <a:p>
+            <a:pPr algn="ctr"/>
+            <a:r>
+              <a:rPr sz="5400" b="1">
+                <a:solidFill>
+                  <a:srgbClr val="FFFFFF"/>
+                </a:solidFill>
+                <a:latin typeface="Manrope"/>
+              </a:rPr>
+              <a:t>2</a:t>
+            </a:r>
+          </a:p>
+        </p:txBody>
+      </p:sp>
+      <p:sp>
+        <p:nvSpPr>
+          <p:cNvPr id="7" name="TextBox 6"/>
+          <p:cNvSpPr txBox="1"/>
+          <p:nvPr/>
+        </p:nvSpPr>
+        <p:spPr>
+          <a:xfrm>
+            <a:off x="762000" y="5619750"/>
+            <a:ext cx="8763000" cy="533400"/>
+          </a:xfrm>
+          <a:prstGeom prst="rect">
+            <a:avLst/>
+          </a:prstGeom>
+          <a:noFill/>
+        </p:spPr>
+        <p:txBody>
+          <a:bodyPr wrap="square" anchor="ctr">
+            <a:spAutoFit/>
+          </a:bodyPr>
+          <a:lstStyle/>
+          <a:p>
+            <a:pPr algn="ctr"/>
+            <a:r>
+              <a:rPr sz="3000" b="1">
+                <a:solidFill>
+                  <a:srgbClr val="7855F8"/>
+                </a:solidFill>
+                <a:latin typeface="Manrope"/>
+              </a:rPr>
+              <a:t>PASO 2</a:t>
+            </a:r>
+          </a:p>
+        </p:txBody>
+      </p:sp>
+      <p:sp>
+        <p:nvSpPr>
+          <p:cNvPr id="8" name="TextBox 7"/>
+          <p:cNvSpPr txBox="1"/>
+          <p:nvPr/>
+        </p:nvSpPr>
+        <p:spPr>
+          <a:xfrm>
+            <a:off x="666750" y="6248400"/>
+            <a:ext cx="8953500" cy="1714500"/>
+          </a:xfrm>
+          <a:prstGeom prst="rect">
+            <a:avLst/>
+          </a:prstGeom>
+          <a:noFill/>
+        </p:spPr>
+        <p:txBody>
+          <a:bodyPr wrap="square" anchor="ctr">
+            <a:spAutoFit/>
+          </a:bodyPr>
+          <a:lstStyle/>
+          <a:p>
+            <a:pPr algn="ctr"/>
+            <a:r>
+              <a:rPr sz="4600" b="1">
+                <a:solidFill>
+                  <a:srgbClr val="1A1730"/>
+                </a:solidFill>
+                <a:latin typeface="Manrope"/>
+              </a:rPr>
+              <a:t>Te contactan profesionales</a:t>
+            </a:r>
+          </a:p>
+        </p:txBody>
+      </p:sp>
+      <p:sp>
+        <p:nvSpPr>
+          <p:cNvPr id="9" name="TextBox 8"/>
+          <p:cNvSpPr txBox="1"/>
+          <p:nvPr/>
+        </p:nvSpPr>
+        <p:spPr>
+          <a:xfrm>
+            <a:off x="1143000" y="7581900"/>
+            <a:ext cx="8001000" cy="1714500"/>
+          </a:xfrm>
+          <a:prstGeom prst="rect">
+            <a:avLst/>
+          </a:prstGeom>
+          <a:noFill/>
+        </p:spPr>
+        <p:txBody>
+          <a:bodyPr wrap="square" anchor="ctr">
+            <a:spAutoFit/>
+          </a:bodyPr>
+          <a:lstStyle/>
+          <a:p>
+            <a:pPr algn="ctr"/>
+            <a:r>
+              <a:rPr sz="2700" b="0">
+                <a:solidFill>
+                  <a:srgbClr val="145A5C"/>
+                </a:solidFill>
+                <a:latin typeface="Manrope"/>
+              </a:rPr>
+              <a:t>Hasta 4 profesionales verificados te llaman para cotizar tu caso.</a:t>
+            </a:r>
+          </a:p>
+        </p:txBody>
+      </p:sp>
+      <p:pic>
+        <p:nvPicPr>
+          <p:cNvPr id="10" name="Picture 9" descr="logo-color.png"/>
+          <p:cNvPicPr>
+            <a:picLocks noChangeAspect="1"/>
+          </p:cNvPicPr>
+          <p:nvPr/>
+        </p:nvPicPr>
+        <p:blipFill>
+          <a:blip r:embed="rId3"/>
+          <a:stretch>
+            <a:fillRect/>
+          </a:stretch>
+        </p:blipFill>
+        <p:spPr>
+          <a:xfrm>
+            <a:off x="4333875" y="11430000"/>
+            <a:ext cx="1619250" cy="822243"/>
           </a:xfrm>
           <a:prstGeom prst="rect">
             <a:avLst/>
@@ -3218,9 +3929,97 @@
         <p:nvPr/>
       </p:nvGrpSpPr>
       <p:grpSpPr/>
+      <p:sp>
+        <p:nvSpPr>
+          <p:cNvPr id="2" name="Rectangle 1"/>
+          <p:cNvSpPr/>
+          <p:nvPr/>
+        </p:nvSpPr>
+        <p:spPr>
+          <a:xfrm>
+            <a:off x="0" y="0"/>
+            <a:ext cx="10287000" cy="12858750"/>
+          </a:xfrm>
+          <a:prstGeom prst="rect">
+            <a:avLst/>
+          </a:prstGeom>
+          <a:solidFill>
+            <a:srgbClr val="1A1A2E"/>
+          </a:solidFill>
+          <a:ln>
+            <a:noFill/>
+          </a:ln>
+          <a:effectLst/>
+        </p:spPr>
+        <p:style>
+          <a:lnRef idx="1">
+            <a:schemeClr val="accent1"/>
+          </a:lnRef>
+          <a:fillRef idx="3">
+            <a:schemeClr val="accent1"/>
+          </a:fillRef>
+          <a:effectRef idx="2">
+            <a:schemeClr val="accent1"/>
+          </a:effectRef>
+          <a:fontRef idx="minor">
+            <a:schemeClr val="lt1"/>
+          </a:fontRef>
+        </p:style>
+        <p:txBody>
+          <a:bodyPr rtlCol="0" anchor="ctr"/>
+          <a:lstStyle/>
+          <a:p>
+            <a:pPr algn="ctr"/>
+          </a:p>
+        </p:txBody>
+      </p:sp>
+      <p:sp>
+        <p:nvSpPr>
+          <p:cNvPr id="3" name="Rounded Rectangle 2"/>
+          <p:cNvSpPr/>
+          <p:nvPr/>
+        </p:nvSpPr>
+        <p:spPr>
+          <a:xfrm>
+            <a:off x="3571875" y="2000250"/>
+            <a:ext cx="3143250" cy="3143250"/>
+          </a:xfrm>
+          <a:prstGeom prst="roundRect">
+            <a:avLst/>
+          </a:prstGeom>
+          <a:solidFill>
+            <a:srgbClr val="FFFFFF"/>
+          </a:solidFill>
+          <a:ln>
+            <a:noFill/>
+          </a:ln>
+          <a:effectLst/>
+        </p:spPr>
+        <p:style>
+          <a:lnRef idx="1">
+            <a:schemeClr val="accent1"/>
+          </a:lnRef>
+          <a:fillRef idx="3">
+            <a:schemeClr val="accent1"/>
+          </a:fillRef>
+          <a:effectRef idx="2">
+            <a:schemeClr val="accent1"/>
+          </a:effectRef>
+          <a:fontRef idx="minor">
+            <a:schemeClr val="lt1"/>
+          </a:fontRef>
+        </p:style>
+        <p:txBody>
+          <a:bodyPr rtlCol="0" anchor="ctr"/>
+          <a:lstStyle/>
+          <a:p>
+            <a:pPr algn="ctr"/>
+          </a:p>
+        </p:txBody>
+      </p:sp>
       <p:pic>
         <p:nvPicPr>
-          <p:cNvPr id="2" name="Picture 1" descr="04 Paso 3.png"/>
+          <p:cNvPr id="4" name="Picture 3" descr="paso-elige.png"/>
           <p:cNvPicPr>
             <a:picLocks noChangeAspect="1"/>
           </p:cNvPicPr>
@@ -3234,8 +4033,218 @@
         </p:blipFill>
         <p:spPr>
           <a:xfrm>
-            <a:off x="0" y="0"/>
-            <a:ext cx="10287000" cy="12858750"/>
+            <a:off x="3952875" y="2381250"/>
+            <a:ext cx="2381250" cy="2381250"/>
+          </a:xfrm>
+          <a:prstGeom prst="rect">
+            <a:avLst/>
+          </a:prstGeom>
+        </p:spPr>
+      </p:pic>
+      <p:sp>
+        <p:nvSpPr>
+          <p:cNvPr id="5" name="Oval 4"/>
+          <p:cNvSpPr/>
+          <p:nvPr/>
+        </p:nvSpPr>
+        <p:spPr>
+          <a:xfrm>
+            <a:off x="6029325" y="1447800"/>
+            <a:ext cx="1238250" cy="1238250"/>
+          </a:xfrm>
+          <a:prstGeom prst="ellipse">
+            <a:avLst/>
+          </a:prstGeom>
+          <a:solidFill>
+            <a:srgbClr val="E88A1A"/>
+          </a:solidFill>
+          <a:ln w="63500">
+            <a:solidFill>
+              <a:srgbClr val="FFFFFF"/>
+            </a:solidFill>
+          </a:ln>
+          <a:effectLst/>
+        </p:spPr>
+        <p:style>
+          <a:lnRef idx="1">
+            <a:schemeClr val="accent1"/>
+          </a:lnRef>
+          <a:fillRef idx="3">
+            <a:schemeClr val="accent1"/>
+          </a:fillRef>
+          <a:effectRef idx="2">
+            <a:schemeClr val="accent1"/>
+          </a:effectRef>
+          <a:fontRef idx="minor">
+            <a:schemeClr val="lt1"/>
+          </a:fontRef>
+        </p:style>
+        <p:txBody>
+          <a:bodyPr rtlCol="0" anchor="ctr"/>
+          <a:lstStyle/>
+          <a:p>
+            <a:pPr algn="ctr"/>
+          </a:p>
+        </p:txBody>
+      </p:sp>
+      <p:sp>
+        <p:nvSpPr>
+          <p:cNvPr id="6" name="TextBox 5"/>
+          <p:cNvSpPr txBox="1"/>
+          <p:nvPr/>
+        </p:nvSpPr>
+        <p:spPr>
+          <a:xfrm>
+            <a:off x="6029325" y="1447800"/>
+            <a:ext cx="1238250" cy="1238250"/>
+          </a:xfrm>
+          <a:prstGeom prst="rect">
+            <a:avLst/>
+          </a:prstGeom>
+          <a:noFill/>
+        </p:spPr>
+        <p:txBody>
+          <a:bodyPr wrap="square" anchor="ctr">
+            <a:spAutoFit/>
+          </a:bodyPr>
+          <a:lstStyle/>
+          <a:p>
+            <a:pPr algn="ctr"/>
+            <a:r>
+              <a:rPr sz="5400" b="1">
+                <a:solidFill>
+                  <a:srgbClr val="FFFFFF"/>
+                </a:solidFill>
+                <a:latin typeface="Manrope"/>
+              </a:rPr>
+              <a:t>3</a:t>
+            </a:r>
+          </a:p>
+        </p:txBody>
+      </p:sp>
+      <p:sp>
+        <p:nvSpPr>
+          <p:cNvPr id="7" name="TextBox 6"/>
+          <p:cNvSpPr txBox="1"/>
+          <p:nvPr/>
+        </p:nvSpPr>
+        <p:spPr>
+          <a:xfrm>
+            <a:off x="762000" y="5619750"/>
+            <a:ext cx="8763000" cy="533400"/>
+          </a:xfrm>
+          <a:prstGeom prst="rect">
+            <a:avLst/>
+          </a:prstGeom>
+          <a:noFill/>
+        </p:spPr>
+        <p:txBody>
+          <a:bodyPr wrap="square" anchor="ctr">
+            <a:spAutoFit/>
+          </a:bodyPr>
+          <a:lstStyle/>
+          <a:p>
+            <a:pPr algn="ctr"/>
+            <a:r>
+              <a:rPr sz="3000" b="1">
+                <a:solidFill>
+                  <a:srgbClr val="E88A1A"/>
+                </a:solidFill>
+                <a:latin typeface="Manrope"/>
+              </a:rPr>
+              <a:t>PASO 3</a:t>
+            </a:r>
+          </a:p>
+        </p:txBody>
+      </p:sp>
+      <p:sp>
+        <p:nvSpPr>
+          <p:cNvPr id="8" name="TextBox 7"/>
+          <p:cNvSpPr txBox="1"/>
+          <p:nvPr/>
+        </p:nvSpPr>
+        <p:spPr>
+          <a:xfrm>
+            <a:off x="666750" y="6248400"/>
+            <a:ext cx="8953500" cy="1714500"/>
+          </a:xfrm>
+          <a:prstGeom prst="rect">
+            <a:avLst/>
+          </a:prstGeom>
+          <a:noFill/>
+        </p:spPr>
+        <p:txBody>
+          <a:bodyPr wrap="square" anchor="ctr">
+            <a:spAutoFit/>
+          </a:bodyPr>
+          <a:lstStyle/>
+          <a:p>
+            <a:pPr algn="ctr"/>
+            <a:r>
+              <a:rPr sz="4600" b="1">
+                <a:solidFill>
+                  <a:srgbClr val="FFFFFF"/>
+                </a:solidFill>
+                <a:latin typeface="Manrope"/>
+              </a:rPr>
+              <a:t>Eliges la mejor opción</a:t>
+            </a:r>
+          </a:p>
+        </p:txBody>
+      </p:sp>
+      <p:sp>
+        <p:nvSpPr>
+          <p:cNvPr id="9" name="TextBox 8"/>
+          <p:cNvSpPr txBox="1"/>
+          <p:nvPr/>
+        </p:nvSpPr>
+        <p:spPr>
+          <a:xfrm>
+            <a:off x="1143000" y="7581900"/>
+            <a:ext cx="8001000" cy="1714500"/>
+          </a:xfrm>
+          <a:prstGeom prst="rect">
+            <a:avLst/>
+          </a:prstGeom>
+          <a:noFill/>
+        </p:spPr>
+        <p:txBody>
+          <a:bodyPr wrap="square" anchor="ctr">
+            <a:spAutoFit/>
+          </a:bodyPr>
+          <a:lstStyle/>
+          <a:p>
+            <a:pPr algn="ctr"/>
+            <a:r>
+              <a:rPr sz="2700" b="0">
+                <a:solidFill>
+                  <a:srgbClr val="C3C3DC"/>
+                </a:solidFill>
+                <a:latin typeface="Manrope"/>
+              </a:rPr>
+              <a:t>Comparas y eliges. El pago lo acuerdas directo con el profesional.</a:t>
+            </a:r>
+          </a:p>
+        </p:txBody>
+      </p:sp>
+      <p:pic>
+        <p:nvPicPr>
+          <p:cNvPr id="10" name="Picture 9" descr="logo-blanco.png"/>
+          <p:cNvPicPr>
+            <a:picLocks noChangeAspect="1"/>
+          </p:cNvPicPr>
+          <p:nvPr/>
+        </p:nvPicPr>
+        <p:blipFill>
+          <a:blip r:embed="rId3"/>
+          <a:stretch>
+            <a:fillRect/>
+          </a:stretch>
+        </p:blipFill>
+        <p:spPr>
+          <a:xfrm>
+            <a:off x="4333875" y="11430000"/>
+            <a:ext cx="1619250" cy="822243"/>
           </a:xfrm>
           <a:prstGeom prst="rect">
             <a:avLst/>
@@ -3260,9 +4269,53 @@
         <p:nvPr/>
       </p:nvGrpSpPr>
       <p:grpSpPr/>
+      <p:sp>
+        <p:nvSpPr>
+          <p:cNvPr id="2" name="Rectangle 1"/>
+          <p:cNvSpPr/>
+          <p:nvPr/>
+        </p:nvSpPr>
+        <p:spPr>
+          <a:xfrm>
+            <a:off x="0" y="0"/>
+            <a:ext cx="10287000" cy="12858750"/>
+          </a:xfrm>
+          <a:prstGeom prst="rect">
+            <a:avLst/>
+          </a:prstGeom>
+          <a:solidFill>
+            <a:srgbClr val="ECEAFE"/>
+          </a:solidFill>
+          <a:ln>
+            <a:noFill/>
+          </a:ln>
+          <a:effectLst/>
+        </p:spPr>
+        <p:style>
+          <a:lnRef idx="1">
+            <a:schemeClr val="accent1"/>
+          </a:lnRef>
+          <a:fillRef idx="3">
+            <a:schemeClr val="accent1"/>
+          </a:fillRef>
+          <a:effectRef idx="2">
+            <a:schemeClr val="accent1"/>
+          </a:effectRef>
+          <a:fontRef idx="minor">
+            <a:schemeClr val="lt1"/>
+          </a:fontRef>
+        </p:style>
+        <p:txBody>
+          <a:bodyPr rtlCol="0" anchor="ctr"/>
+          <a:lstStyle/>
+          <a:p>
+            <a:pPr algn="ctr"/>
+          </a:p>
+        </p:txBody>
+      </p:sp>
       <p:pic>
         <p:nvPicPr>
-          <p:cNvPr id="2" name="Picture 1" descr="05 Cierre.png"/>
+          <p:cNvPr id="3" name="Picture 2" descr="mascota-perro.png"/>
           <p:cNvPicPr>
             <a:picLocks noChangeAspect="1"/>
           </p:cNvPicPr>
@@ -3276,8 +4329,114 @@
         </p:blipFill>
         <p:spPr>
           <a:xfrm>
-            <a:off x="0" y="0"/>
-            <a:ext cx="10287000" cy="12858750"/>
+            <a:off x="3048000" y="1428750"/>
+            <a:ext cx="4191000" cy="4191000"/>
+          </a:xfrm>
+          <a:prstGeom prst="rect">
+            <a:avLst/>
+          </a:prstGeom>
+        </p:spPr>
+      </p:pic>
+      <p:sp>
+        <p:nvSpPr>
+          <p:cNvPr id="4" name="TextBox 3"/>
+          <p:cNvSpPr txBox="1"/>
+          <p:nvPr/>
+        </p:nvSpPr>
+        <p:spPr>
+          <a:xfrm>
+            <a:off x="857250" y="6858000"/>
+            <a:ext cx="8572500" cy="1905000"/>
+          </a:xfrm>
+          <a:prstGeom prst="rect">
+            <a:avLst/>
+          </a:prstGeom>
+          <a:noFill/>
+        </p:spPr>
+        <p:txBody>
+          <a:bodyPr wrap="square" anchor="ctr">
+            <a:spAutoFit/>
+          </a:bodyPr>
+          <a:lstStyle/>
+          <a:p>
+            <a:pPr algn="ctr"/>
+            <a:r>
+              <a:rPr sz="4400" b="1">
+                <a:solidFill>
+                  <a:srgbClr val="7855F8"/>
+                </a:solidFill>
+                <a:latin typeface="Manrope"/>
+              </a:rPr>
+              <a:t>Publica tu pega</a:t>
+            </a:r>
+          </a:p>
+          <a:p>
+            <a:pPr algn="ctr"/>
+            <a:r>
+              <a:rPr sz="4400" b="1">
+                <a:solidFill>
+                  <a:srgbClr val="7855F8"/>
+                </a:solidFill>
+                <a:latin typeface="Manrope"/>
+              </a:rPr>
+              <a:t>gratis</a:t>
+            </a:r>
+          </a:p>
+        </p:txBody>
+      </p:sp>
+      <p:sp>
+        <p:nvSpPr>
+          <p:cNvPr id="5" name="TextBox 4"/>
+          <p:cNvSpPr txBox="1"/>
+          <p:nvPr/>
+        </p:nvSpPr>
+        <p:spPr>
+          <a:xfrm>
+            <a:off x="1428750" y="8667750"/>
+            <a:ext cx="7429500" cy="1524000"/>
+          </a:xfrm>
+          <a:prstGeom prst="rect">
+            <a:avLst/>
+          </a:prstGeom>
+          <a:noFill/>
+        </p:spPr>
+        <p:txBody>
+          <a:bodyPr wrap="square" anchor="ctr">
+            <a:spAutoFit/>
+          </a:bodyPr>
+          <a:lstStyle/>
+          <a:p>
+            <a:pPr algn="ctr"/>
+            <a:r>
+              <a:rPr sz="2600" b="0">
+                <a:solidFill>
+                  <a:srgbClr val="5A5082"/>
+                </a:solidFill>
+                <a:latin typeface="Manrope"/>
+              </a:rPr>
+              <a:t>Hasta 4 maestros verificados de tu comuna te cotizan · solo RM</a:t>
+            </a:r>
+          </a:p>
+        </p:txBody>
+      </p:sp>
+      <p:pic>
+        <p:nvPicPr>
+          <p:cNvPr id="6" name="Picture 5" descr="logo-color.png"/>
+          <p:cNvPicPr>
+            <a:picLocks noChangeAspect="1"/>
+          </p:cNvPicPr>
+          <p:nvPr/>
+        </p:nvPicPr>
+        <p:blipFill>
+          <a:blip r:embed="rId3"/>
+          <a:stretch>
+            <a:fillRect/>
+          </a:stretch>
+        </p:blipFill>
+        <p:spPr>
+          <a:xfrm>
+            <a:off x="4333875" y="11430000"/>
+            <a:ext cx="1619250" cy="822243"/>
           </a:xfrm>
           <a:prstGeom prst="rect">
             <a:avLst/>
